--- a/public/fun/pack/pptx/weddingpro/결혼식프리미엄_10_감사·답례중심_올리브샴페인.pptx
+++ b/public/fun/pack/pptx/weddingpro/결혼식프리미엄_10_감사·답례중심_올리브샴페인.pptx
@@ -113,12 +113,12 @@
   <p:extLst>
     <p:ext uri="{521415D9-36F7-43E2-AB2F-B90AF26B5E84}">
       <p14:sectionLst xmlns:p14="http://schemas.microsoft.com/office/powerpoint/2010/main">
-        <p14:section name="시작" id="{B45366AA-89F1-4D75-BCE3-88D330F55092}">
+        <p14:section name="시작" id="{3004F905-4172-44D7-9526-D246BEEB4288}">
           <p14:sldIdLst>
             <p14:sldId id="256"/>
           </p14:sldIdLst>
         </p14:section>
-        <p14:section name="본문" id="{D8C612BE-7F9B-449C-A170-080665DCD19A}">
+        <p14:section name="본문" id="{D96077EE-4AE0-4885-87E4-D0ED902785A9}">
           <p14:sldIdLst>
             <p14:sldId id="257"/>
             <p14:sldId id="258"/>
@@ -127,7 +127,7 @@
             <p14:sldId id="261"/>
           </p14:sldIdLst>
         </p14:section>
-        <p14:section name="마무리" id="{E4DE889D-7DED-4C6A-862E-85BAA0893A91}">
+        <p14:section name="마무리" id="{DCE13534-247D-412B-B4DE-C9F8939F3800}">
           <p14:sldIdLst>
             <p14:sldId id="262"/>
           </p14:sldIdLst>
@@ -3024,7 +3024,7 @@
             </a:lvl1pPr>
           </a:lstStyle>
           <a:p>
-            <a:fld id="{0D417E5B-B42F-46C2-A6B8-139D8DEA7477}" type="slidenum">
+            <a:fld id="{05F4BAF9-3E58-490F-88AF-B62DBC3CA28A}" type="slidenum">
               <a:rPr lang="en-US"/>
               <a:t>‹#›</a:t>
             </a:fld>
@@ -5197,7 +5197,7 @@
             </a:lvl1pPr>
           </a:lstStyle>
           <a:p>
-            <a:fld id="{B13BD7CD-C176-415C-8F99-05831A2A0228}" type="slidenum">
+            <a:fld id="{09148A48-A066-497C-857F-AF615703648F}" type="slidenum">
               <a:rPr lang="en-US"/>
               <a:t>‹#›</a:t>
             </a:fld>
@@ -5867,7 +5867,7 @@
             </a:lvl1pPr>
           </a:lstStyle>
           <a:p>
-            <a:fld id="{C042C80C-B030-4775-B210-CD4CF764634E}" type="slidenum">
+            <a:fld id="{02E83599-4361-4BFD-998F-FF4369288E65}" type="slidenum">
               <a:rPr lang="en-US"/>
               <a:t>‹#›</a:t>
             </a:fld>
@@ -6736,7 +6736,7 @@
           <a:p>
             <a:r>
               <a:rPr lang="ko-KR"/>
-              <a:t>0000. 00. 00 · 예식장 이름</a:t>
+              <a:t>날짜 입력 · 예식장 이름</a:t>
             </a:r>
           </a:p>
         </p:txBody>
@@ -6971,7 +6971,7 @@
           <a:bodyPr/>
           <a:lstStyle/>
           <a:p>
-            <a:fld id="{1CC9A539-F268-4EE5-A262-4847E71728CE}" type="slidenum">
+            <a:fld id="{7EB4C17A-A61D-4268-9877-3212C2377FFF}" type="slidenum">
               <a:rPr lang="en-US"/>
               <a:t>‹#›</a:t>
             </a:fld>
@@ -7415,7 +7415,7 @@
           <a:bodyPr/>
           <a:lstStyle/>
           <a:p>
-            <a:fld id="{3DE8A03B-5AD8-4C44-83CA-AC7FFAB64DD2}" type="slidenum">
+            <a:fld id="{547B9944-C8AA-43A2-B016-8CE55DA5B175}" type="slidenum">
               <a:rPr lang="en-US"/>
               <a:t>‹#›</a:t>
             </a:fld>
@@ -7778,7 +7778,7 @@
           <a:bodyPr/>
           <a:lstStyle/>
           <a:p>
-            <a:fld id="{B0CB1F8F-C529-46A5-AB64-1B38B3DAC69D}" type="slidenum">
+            <a:fld id="{BAD50E61-924A-4621-9509-30EDEE7E0668}" type="slidenum">
               <a:rPr lang="en-US"/>
               <a:t>‹#›</a:t>
             </a:fld>
@@ -9090,7 +9090,7 @@
           <a:bodyPr/>
           <a:lstStyle/>
           <a:p>
-            <a:fld id="{631EF59B-1A2E-4B99-A606-6C9103B2C53D}" type="slidenum">
+            <a:fld id="{EA9B899D-A761-47B0-B7D9-E8A685E03956}" type="slidenum">
               <a:rPr lang="en-US"/>
               <a:t>‹#›</a:t>
             </a:fld>
@@ -9178,7 +9178,7 @@
           <a:bodyPr/>
           <a:lstStyle/>
           <a:p>
-            <a:fld id="{02B45AE3-5521-4B31-8F80-7CDEB826ED9E}" type="slidenum">
+            <a:fld id="{8A2E3F8C-1746-4050-B765-EDC4B3896164}" type="slidenum">
               <a:rPr lang="en-US"/>
               <a:t>‹#›</a:t>
             </a:fld>
